--- a/course/slides/AF-TRACKF-M08/AF-TRACKF-M08-v1.pptx
+++ b/course/slides/AF-TRACKF-M08/AF-TRACKF-M08-v1.pptx
@@ -8433,7 +8433,7 @@
         </p:blipFill>
         <p:spPr>
           <a:xfrm>
-            <a:off x="609600" y="3185160"/>
+            <a:off x="609600" y="3020060"/>
             <a:ext cx="1016000" cy="1016000"/>
           </a:xfrm>
           <a:prstGeom prst="rect">
@@ -8449,7 +8449,7 @@
         </p:nvSpPr>
         <p:spPr>
           <a:xfrm>
-            <a:off x="2070100" y="3147060"/>
+            <a:off x="2070100" y="2981960"/>
             <a:ext cx="9563100" cy="619760"/>
           </a:xfrm>
           <a:prstGeom prst="rect">
@@ -8488,8 +8488,8 @@
         </p:nvSpPr>
         <p:spPr>
           <a:xfrm>
-            <a:off x="2070100" y="3931920"/>
-            <a:ext cx="9563100" cy="355600"/>
+            <a:off x="2070100" y="3766820"/>
+            <a:ext cx="9563100" cy="685800"/>
           </a:xfrm>
           <a:prstGeom prst="rect">
             <a:avLst/>
@@ -8514,7 +8514,23 @@
                 </a:solidFill>
                 <a:latin typeface="Lexend"/>
               </a:rPr>
-              <a:t>Maya is twelve.</a:t>
+              <a:t>She tried the new Stayproof site on her laptop, signing up as a brand-new</a:t>
+            </a:r>
+          </a:p>
+          <a:p>
+            <a:pPr algn="l">
+              <a:lnSpc>
+                <a:spcPts val="2600"/>
+              </a:lnSpc>
+            </a:pPr>
+            <a:r>
+              <a:rPr sz="2000" b="0">
+                <a:solidFill>
+                  <a:srgbClr val="756E65"/>
+                </a:solidFill>
+                <a:latin typeface="Lexend"/>
+              </a:rPr>
+              <a:t>kennel worker, and everything worked.</a:t>
             </a:r>
           </a:p>
         </p:txBody>
@@ -9325,7 +9341,7 @@
         </p:blipFill>
         <p:spPr>
           <a:xfrm>
-            <a:off x="609600" y="3185160"/>
+            <a:off x="609600" y="3020060"/>
             <a:ext cx="1016000" cy="1016000"/>
           </a:xfrm>
           <a:prstGeom prst="rect">
@@ -9341,7 +9357,7 @@
         </p:nvSpPr>
         <p:spPr>
           <a:xfrm>
-            <a:off x="2070100" y="3147060"/>
+            <a:off x="2070100" y="2981960"/>
             <a:ext cx="9563100" cy="619760"/>
           </a:xfrm>
           <a:prstGeom prst="rect">
@@ -9380,8 +9396,8 @@
         </p:nvSpPr>
         <p:spPr>
           <a:xfrm>
-            <a:off x="2070100" y="3931920"/>
-            <a:ext cx="9563100" cy="355600"/>
+            <a:off x="2070100" y="3766820"/>
+            <a:ext cx="9563100" cy="685800"/>
           </a:xfrm>
           <a:prstGeom prst="rect">
             <a:avLst/>
@@ -9406,7 +9422,23 @@
                 </a:solidFill>
                 <a:latin typeface="Lexend"/>
               </a:rPr>
-              <a:t>Next comes the launch walk.</a:t>
+              <a:t>Before the gate, a brand-new account for each brand walks the whole</a:t>
+            </a:r>
+          </a:p>
+          <a:p>
+            <a:pPr algn="l">
+              <a:lnSpc>
+                <a:spcPts val="2600"/>
+              </a:lnSpc>
+            </a:pPr>
+            <a:r>
+              <a:rPr sz="2000" b="0">
+                <a:solidFill>
+                  <a:srgbClr val="756E65"/>
+                </a:solidFill>
+                <a:latin typeface="Lexend"/>
+              </a:rPr>
+              <a:t>journey on the live site, on desktop and on phone, including email...</a:t>
             </a:r>
           </a:p>
         </p:txBody>
@@ -10217,7 +10249,7 @@
         </p:blipFill>
         <p:spPr>
           <a:xfrm>
-            <a:off x="609600" y="3185160"/>
+            <a:off x="609600" y="3020060"/>
             <a:ext cx="1016000" cy="1016000"/>
           </a:xfrm>
           <a:prstGeom prst="rect">
@@ -10233,7 +10265,7 @@
         </p:nvSpPr>
         <p:spPr>
           <a:xfrm>
-            <a:off x="2070100" y="3147060"/>
+            <a:off x="2070100" y="2981960"/>
             <a:ext cx="9563100" cy="619760"/>
           </a:xfrm>
           <a:prstGeom prst="rect">
@@ -10272,8 +10304,8 @@
         </p:nvSpPr>
         <p:spPr>
           <a:xfrm>
-            <a:off x="2070100" y="3931920"/>
-            <a:ext cx="9563100" cy="355600"/>
+            <a:off x="2070100" y="3766820"/>
+            <a:ext cx="9563100" cy="685800"/>
           </a:xfrm>
           <a:prstGeom prst="rect">
             <a:avLst/>
@@ -10298,7 +10330,23 @@
                 </a:solidFill>
                 <a:latin typeface="Lexend"/>
               </a:rPr>
-              <a:t>Money is tested for real.</a:t>
+              <a:t>Checkout is tested on the live link with a 100 percent off test code: buy, sign</a:t>
+            </a:r>
+          </a:p>
+          <a:p>
+            <a:pPr algn="l">
+              <a:lnSpc>
+                <a:spcPts val="2600"/>
+              </a:lnSpc>
+            </a:pPr>
+            <a:r>
+              <a:rPr sz="2000" b="0">
+                <a:solidFill>
+                  <a:srgbClr val="756E65"/>
+                </a:solidFill>
+                <a:latin typeface="Lexend"/>
+              </a:rPr>
+              <a:t>in, and get access.</a:t>
             </a:r>
           </a:p>
         </p:txBody>
@@ -11580,7 +11628,7 @@
         </p:blipFill>
         <p:spPr>
           <a:xfrm>
-            <a:off x="609600" y="3185160"/>
+            <a:off x="609600" y="3020060"/>
             <a:ext cx="1016000" cy="1016000"/>
           </a:xfrm>
           <a:prstGeom prst="rect">
@@ -11596,7 +11644,7 @@
         </p:nvSpPr>
         <p:spPr>
           <a:xfrm>
-            <a:off x="2070100" y="3147060"/>
+            <a:off x="2070100" y="2981960"/>
             <a:ext cx="9563100" cy="619760"/>
           </a:xfrm>
           <a:prstGeom prst="rect">
@@ -11635,8 +11683,8 @@
         </p:nvSpPr>
         <p:spPr>
           <a:xfrm>
-            <a:off x="2070100" y="3931920"/>
-            <a:ext cx="9563100" cy="355600"/>
+            <a:off x="2070100" y="3766820"/>
+            <a:ext cx="9563100" cy="685800"/>
           </a:xfrm>
           <a:prstGeom prst="rect">
             <a:avLst/>
@@ -11661,7 +11709,23 @@
                 </a:solidFill>
                 <a:latin typeface="Lexend"/>
               </a:rPr>
-              <a:t>What about growing the app after launch?</a:t>
+              <a:t>The factory's template has a weekly boost line: a weekly proposal of ways to</a:t>
+            </a:r>
+          </a:p>
+          <a:p>
+            <a:pPr algn="l">
+              <a:lnSpc>
+                <a:spcPts val="2600"/>
+              </a:lnSpc>
+            </a:pPr>
+            <a:r>
+              <a:rPr sz="2000" b="0">
+                <a:solidFill>
+                  <a:srgbClr val="756E65"/>
+                </a:solidFill>
+                <a:latin typeface="Lexend"/>
+              </a:rPr>
+              <a:t>help the app get found, using parts from the Boost shelf,...</a:t>
             </a:r>
           </a:p>
         </p:txBody>
@@ -14082,7 +14146,7 @@
         </p:blipFill>
         <p:spPr>
           <a:xfrm>
-            <a:off x="609600" y="3185160"/>
+            <a:off x="609600" y="3020060"/>
             <a:ext cx="1016000" cy="1016000"/>
           </a:xfrm>
           <a:prstGeom prst="rect">
@@ -14098,7 +14162,7 @@
         </p:nvSpPr>
         <p:spPr>
           <a:xfrm>
-            <a:off x="2070100" y="3147060"/>
+            <a:off x="2070100" y="2981960"/>
             <a:ext cx="9563100" cy="619760"/>
           </a:xfrm>
           <a:prstGeom prst="rect">
@@ -14137,8 +14201,8 @@
         </p:nvSpPr>
         <p:spPr>
           <a:xfrm>
-            <a:off x="2070100" y="3931920"/>
-            <a:ext cx="9563100" cy="355600"/>
+            <a:off x="2070100" y="3766820"/>
+            <a:ext cx="9563100" cy="685800"/>
           </a:xfrm>
           <a:prstGeom prst="rect">
             <a:avLst/>
@@ -14163,7 +14227,23 @@
                 </a:solidFill>
                 <a:latin typeface="Lexend"/>
               </a:rPr>
-              <a:t>Theo is seventeen.</a:t>
+              <a:t>He was helping to put together a page for Northvale Canine Society, the club</a:t>
+            </a:r>
+          </a:p>
+          <a:p>
+            <a:pPr algn="l">
+              <a:lnSpc>
+                <a:spcPts val="2600"/>
+              </a:lnSpc>
+            </a:pPr>
+            <a:r>
+              <a:rPr sz="2000" b="0">
+                <a:solidFill>
+                  <a:srgbClr val="756E65"/>
+                </a:solidFill>
+                <a:latin typeface="Lexend"/>
+              </a:rPr>
+              <a:t>that resells Litterline to its members under its own name.</a:t>
             </a:r>
           </a:p>
         </p:txBody>
@@ -14528,7 +14608,7 @@
         </p:blipFill>
         <p:spPr>
           <a:xfrm>
-            <a:off x="609600" y="3185160"/>
+            <a:off x="609600" y="3020060"/>
             <a:ext cx="1016000" cy="1016000"/>
           </a:xfrm>
           <a:prstGeom prst="rect">
@@ -14544,7 +14624,7 @@
         </p:nvSpPr>
         <p:spPr>
           <a:xfrm>
-            <a:off x="2070100" y="3147060"/>
+            <a:off x="2070100" y="2981960"/>
             <a:ext cx="9563100" cy="619760"/>
           </a:xfrm>
           <a:prstGeom prst="rect">
@@ -14583,8 +14663,8 @@
         </p:nvSpPr>
         <p:spPr>
           <a:xfrm>
-            <a:off x="2070100" y="3931920"/>
-            <a:ext cx="9563100" cy="355600"/>
+            <a:off x="2070100" y="3766820"/>
+            <a:ext cx="9563100" cy="685800"/>
           </a:xfrm>
           <a:prstGeom prst="rect">
             <a:avLst/>
@@ -14609,7 +14689,23 @@
                 </a:solidFill>
                 <a:latin typeface="Lexend"/>
               </a:rPr>
-              <a:t>This is Stage 7, called Launch.</a:t>
+              <a:t>It happens in the room called Runway, which is tagged Brand, because this</a:t>
+            </a:r>
+          </a:p>
+          <a:p>
+            <a:pPr algn="l">
+              <a:lnSpc>
+                <a:spcPts val="2600"/>
+              </a:lnSpc>
+            </a:pPr>
+            <a:r>
+              <a:rPr sz="2000" b="0">
+                <a:solidFill>
+                  <a:srgbClr val="756E65"/>
+                </a:solidFill>
+                <a:latin typeface="Lexend"/>
+              </a:rPr>
+              <a:t>is where the app meets the outside world under each brand's name.</a:t>
             </a:r>
           </a:p>
         </p:txBody>
@@ -16328,7 +16424,7 @@
         </p:blipFill>
         <p:spPr>
           <a:xfrm>
-            <a:off x="609600" y="2887979"/>
+            <a:off x="609600" y="2722879"/>
             <a:ext cx="1016000" cy="1016000"/>
           </a:xfrm>
           <a:prstGeom prst="rect">
@@ -16344,7 +16440,7 @@
         </p:nvSpPr>
         <p:spPr>
           <a:xfrm>
-            <a:off x="2070100" y="2849879"/>
+            <a:off x="2070100" y="2684779"/>
             <a:ext cx="9563100" cy="1214120"/>
           </a:xfrm>
           <a:prstGeom prst="rect">
@@ -16399,8 +16495,8 @@
         </p:nvSpPr>
         <p:spPr>
           <a:xfrm>
-            <a:off x="2070100" y="4229100"/>
-            <a:ext cx="9563100" cy="355600"/>
+            <a:off x="2070100" y="4064000"/>
+            <a:ext cx="9563100" cy="685800"/>
           </a:xfrm>
           <a:prstGeom prst="rect">
             <a:avLst/>
@@ -16425,7 +16521,23 @@
                 </a:solidFill>
                 <a:latin typeface="Lexend"/>
               </a:rPr>
-              <a:t>How does ClickFunnels talk to the app?</a:t>
+              <a:t>The simplest route is a built-in connection that sends sign-ups and tags</a:t>
+            </a:r>
+          </a:p>
+          <a:p>
+            <a:pPr algn="l">
+              <a:lnSpc>
+                <a:spcPts val="2600"/>
+              </a:lnSpc>
+            </a:pPr>
+            <a:r>
+              <a:rPr sz="2000" b="0">
+                <a:solidFill>
+                  <a:srgbClr val="756E65"/>
+                </a:solidFill>
+                <a:latin typeface="Lexend"/>
+              </a:rPr>
+              <a:t>across.</a:t>
             </a:r>
           </a:p>
         </p:txBody>
@@ -16790,7 +16902,7 @@
         </p:blipFill>
         <p:spPr>
           <a:xfrm>
-            <a:off x="609600" y="3185160"/>
+            <a:off x="609600" y="3020060"/>
             <a:ext cx="1016000" cy="1016000"/>
           </a:xfrm>
           <a:prstGeom prst="rect">
@@ -16806,7 +16918,7 @@
         </p:nvSpPr>
         <p:spPr>
           <a:xfrm>
-            <a:off x="2070100" y="3147060"/>
+            <a:off x="2070100" y="2981960"/>
             <a:ext cx="9563100" cy="619760"/>
           </a:xfrm>
           <a:prstGeom prst="rect">
@@ -16845,8 +16957,8 @@
         </p:nvSpPr>
         <p:spPr>
           <a:xfrm>
-            <a:off x="2070100" y="3931920"/>
-            <a:ext cx="9563100" cy="355600"/>
+            <a:off x="2070100" y="3766820"/>
+            <a:ext cx="9563100" cy="685800"/>
           </a:xfrm>
           <a:prstGeom prst="rect">
             <a:avLst/>
@@ -16871,7 +16983,23 @@
                 </a:solidFill>
                 <a:latin typeface="Lexend"/>
               </a:rPr>
-              <a:t>Now the plan.</a:t>
+              <a:t>Each button on a landing page carries both the brand and the plan inside its</a:t>
+            </a:r>
+          </a:p>
+          <a:p>
+            <a:pPr algn="l">
+              <a:lnSpc>
+                <a:spcPts val="2600"/>
+              </a:lnSpc>
+            </a:pPr>
+            <a:r>
+              <a:rPr sz="2000" b="0">
+                <a:solidFill>
+                  <a:srgbClr val="756E65"/>
+                </a:solidFill>
+                <a:latin typeface="Lexend"/>
+              </a:rPr>
+              <a:t>link.</a:t>
             </a:r>
           </a:p>
         </p:txBody>
